--- a/Introduccion a la Ingenieria/Clases/Clase 16 - Socializacion y evaluacion final del curso/Presentacion.pptx
+++ b/Introduccion a la Ingenieria/Clases/Clase 16 - Socializacion y evaluacion final del curso/Presentacion.pptx
@@ -3807,7 +3807,7 @@
               </a:spcAft>
             </a:pPr>
             <a:r>
-              <a:rPr sz="1300" b="0" i="0">
+              <a:rPr sz="1500" b="0" i="0">
                 <a:solidFill>
                   <a:srgbClr val="333333"/>
                 </a:solidFill>
@@ -3823,7 +3823,7 @@
               </a:spcAft>
             </a:pPr>
             <a:r>
-              <a:rPr sz="1300" b="0" i="0">
+              <a:rPr sz="1500" b="0" i="0">
                 <a:solidFill>
                   <a:srgbClr val="333333"/>
                 </a:solidFill>
@@ -3839,7 +3839,7 @@
               </a:spcAft>
             </a:pPr>
             <a:r>
-              <a:rPr sz="1300" b="0" i="0">
+              <a:rPr sz="1500" b="0" i="0">
                 <a:solidFill>
                   <a:srgbClr val="333333"/>
                 </a:solidFill>
@@ -3855,7 +3855,7 @@
               </a:spcAft>
             </a:pPr>
             <a:r>
-              <a:rPr sz="1300" b="0" i="0">
+              <a:rPr sz="1500" b="0" i="0">
                 <a:solidFill>
                   <a:srgbClr val="333333"/>
                 </a:solidFill>
@@ -3871,7 +3871,7 @@
               </a:spcAft>
             </a:pPr>
             <a:r>
-              <a:rPr sz="1300" b="0" i="0">
+              <a:rPr sz="1500" b="0" i="0">
                 <a:solidFill>
                   <a:srgbClr val="333333"/>
                 </a:solidFill>
@@ -4031,7 +4031,7 @@
               </a:spcAft>
             </a:pPr>
             <a:r>
-              <a:rPr sz="1300" b="0" i="0">
+              <a:rPr sz="1500" b="0" i="0">
                 <a:solidFill>
                   <a:srgbClr val="333333"/>
                 </a:solidFill>
@@ -4040,7 +4040,7 @@
               <a:t>–   «La ingeniería </a:t>
             </a:r>
             <a:r>
-              <a:rPr sz="1300" b="1" i="0">
+              <a:rPr sz="1500" b="1" i="0">
                 <a:solidFill>
                   <a:srgbClr val="333333"/>
                 </a:solidFill>
@@ -4049,7 +4049,7 @@
               <a:t>decide bajo restricciones</a:t>
             </a:r>
             <a:r>
-              <a:rPr sz="1300" b="0" i="0">
+              <a:rPr sz="1500" b="0" i="0">
                 <a:solidFill>
                   <a:srgbClr val="333333"/>
                 </a:solidFill>
@@ -4065,7 +4065,7 @@
               </a:spcAft>
             </a:pPr>
             <a:r>
-              <a:rPr sz="1300" b="0" i="0">
+              <a:rPr sz="1500" b="0" i="0">
                 <a:solidFill>
                   <a:srgbClr val="333333"/>
                 </a:solidFill>
@@ -4074,7 +4074,7 @@
               <a:t>–   «Un problema </a:t>
             </a:r>
             <a:r>
-              <a:rPr sz="1300" b="1" i="0">
+              <a:rPr sz="1500" b="1" i="0">
                 <a:solidFill>
                   <a:srgbClr val="333333"/>
                 </a:solidFill>
@@ -4083,7 +4083,7 @@
               <a:t>se define antes de resolverse</a:t>
             </a:r>
             <a:r>
-              <a:rPr sz="1300" b="0" i="0">
+              <a:rPr sz="1500" b="0" i="0">
                 <a:solidFill>
                   <a:srgbClr val="333333"/>
                 </a:solidFill>
@@ -4099,7 +4099,7 @@
               </a:spcAft>
             </a:pPr>
             <a:r>
-              <a:rPr sz="1300" b="0" i="0">
+              <a:rPr sz="1500" b="0" i="0">
                 <a:solidFill>
                   <a:srgbClr val="333333"/>
                 </a:solidFill>
@@ -4108,7 +4108,7 @@
               <a:t>–   «Que funcione no basta: hay </a:t>
             </a:r>
             <a:r>
-              <a:rPr sz="1300" b="1" i="0">
+              <a:rPr sz="1500" b="1" i="0">
                 <a:solidFill>
                   <a:srgbClr val="333333"/>
                 </a:solidFill>
@@ -4117,7 +4117,7 @@
               <a:t>criterios de aceptación verificables</a:t>
             </a:r>
             <a:r>
-              <a:rPr sz="1300" b="0" i="0">
+              <a:rPr sz="1500" b="0" i="0">
                 <a:solidFill>
                   <a:srgbClr val="333333"/>
                 </a:solidFill>
@@ -4133,7 +4133,7 @@
               </a:spcAft>
             </a:pPr>
             <a:r>
-              <a:rPr sz="1300" b="0" i="0">
+              <a:rPr sz="1500" b="0" i="0">
                 <a:solidFill>
                   <a:srgbClr val="333333"/>
                 </a:solidFill>
@@ -4142,7 +4142,7 @@
               <a:t>–   «Investigar es ver </a:t>
             </a:r>
             <a:r>
-              <a:rPr sz="1300" b="1" i="0">
+              <a:rPr sz="1500" b="1" i="0">
                 <a:solidFill>
                   <a:srgbClr val="333333"/>
                 </a:solidFill>
@@ -4151,7 +4151,7 @@
               <a:t>qué ya existe y por qué no sirve aquí</a:t>
             </a:r>
             <a:r>
-              <a:rPr sz="1300" b="0" i="0">
+              <a:rPr sz="1500" b="0" i="0">
                 <a:solidFill>
                   <a:srgbClr val="333333"/>
                 </a:solidFill>
@@ -4167,7 +4167,7 @@
               </a:spcAft>
             </a:pPr>
             <a:r>
-              <a:rPr sz="1300" b="0" i="0">
+              <a:rPr sz="1500" b="0" i="0">
                 <a:solidFill>
                   <a:srgbClr val="333333"/>
                 </a:solidFill>
@@ -4176,7 +4176,7 @@
               <a:t>–   «Hay </a:t>
             </a:r>
             <a:r>
-              <a:rPr sz="1300" b="1" i="0">
+              <a:rPr sz="1500" b="1" i="0">
                 <a:solidFill>
                   <a:srgbClr val="333333"/>
                 </a:solidFill>
@@ -4185,7 +4185,7 @@
               <a:t>afectados que nunca la usan</a:t>
             </a:r>
             <a:r>
-              <a:rPr sz="1300" b="0" i="0">
+              <a:rPr sz="1500" b="0" i="0">
                 <a:solidFill>
                   <a:srgbClr val="333333"/>
                 </a:solidFill>
@@ -6524,7 +6524,7 @@
               </a:spcAft>
             </a:pPr>
             <a:r>
-              <a:rPr sz="1600" b="0" i="0">
+              <a:rPr sz="2000" b="0" i="0">
                 <a:solidFill>
                   <a:srgbClr val="333333"/>
                 </a:solidFill>
@@ -6533,7 +6533,7 @@
               <a:t>–   </a:t>
             </a:r>
             <a:r>
-              <a:rPr sz="1600" b="1" i="0">
+              <a:rPr sz="2000" b="1" i="0">
                 <a:solidFill>
                   <a:srgbClr val="333333"/>
                 </a:solidFill>
@@ -6542,7 +6542,7 @@
               <a:t>Lo que queda entregado:</a:t>
             </a:r>
             <a:r>
-              <a:rPr sz="1600" b="0" i="0">
+              <a:rPr sz="2000" b="0" i="0">
                 <a:solidFill>
                   <a:srgbClr val="333333"/>
                 </a:solidFill>
@@ -6551,7 +6551,7 @@
               <a:t> el </a:t>
             </a:r>
             <a:r>
-              <a:rPr sz="1600" b="1" i="0">
+              <a:rPr sz="2000" b="1" i="0">
                 <a:solidFill>
                   <a:srgbClr val="333333"/>
                 </a:solidFill>
@@ -6560,7 +6560,7 @@
               <a:t>informe final</a:t>
             </a:r>
             <a:r>
-              <a:rPr sz="1600" b="0" i="0">
+              <a:rPr sz="2000" b="0" i="0">
                 <a:solidFill>
                   <a:srgbClr val="333333"/>
                 </a:solidFill>
@@ -6569,7 +6569,7 @@
               <a:t> con sus doce secciones (20 %), la </a:t>
             </a:r>
             <a:r>
-              <a:rPr sz="1600" b="1" i="0">
+              <a:rPr sz="2000" b="1" i="0">
                 <a:solidFill>
                   <a:srgbClr val="333333"/>
                 </a:solidFill>
@@ -6578,7 +6578,7 @@
               <a:t>exposición final</a:t>
             </a:r>
             <a:r>
-              <a:rPr sz="1600" b="0" i="0">
+              <a:rPr sz="2000" b="0" i="0">
                 <a:solidFill>
                   <a:srgbClr val="333333"/>
                 </a:solidFill>
@@ -6594,7 +6594,7 @@
               </a:spcAft>
             </a:pPr>
             <a:r>
-              <a:rPr sz="1600" b="0" i="0">
+              <a:rPr sz="2000" b="0" i="0">
                 <a:solidFill>
                   <a:srgbClr val="333333"/>
                 </a:solidFill>
@@ -6603,7 +6603,7 @@
               <a:t>–   </a:t>
             </a:r>
             <a:r>
-              <a:rPr sz="1600" b="1" i="0">
+              <a:rPr sz="2000" b="1" i="0">
                 <a:solidFill>
                   <a:srgbClr val="333333"/>
                 </a:solidFill>
@@ -6612,7 +6612,7 @@
               <a:t>Autoevaluación:</a:t>
             </a:r>
             <a:r>
-              <a:rPr sz="1600" b="0" i="0">
+              <a:rPr sz="2000" b="0" i="0">
                 <a:solidFill>
                   <a:srgbClr val="333333"/>
                 </a:solidFill>
@@ -6628,7 +6628,7 @@
               </a:spcAft>
             </a:pPr>
             <a:r>
-              <a:rPr sz="1600" b="0" i="0">
+              <a:rPr sz="2000" b="0" i="0">
                 <a:solidFill>
                   <a:srgbClr val="333333"/>
                 </a:solidFill>
@@ -6637,7 +6637,7 @@
               <a:t>–   </a:t>
             </a:r>
             <a:r>
-              <a:rPr sz="1600" b="1" i="0">
+              <a:rPr sz="2000" b="1" i="0">
                 <a:solidFill>
                   <a:srgbClr val="333333"/>
                 </a:solidFill>
@@ -6653,7 +6653,7 @@
               </a:spcAft>
             </a:pPr>
             <a:r>
-              <a:rPr sz="1600" b="0" i="0">
+              <a:rPr sz="2000" b="0" i="0">
                 <a:solidFill>
                   <a:srgbClr val="333333"/>
                 </a:solidFill>
@@ -6662,7 +6662,7 @@
               <a:t>–   </a:t>
             </a:r>
             <a:r>
-              <a:rPr sz="1600" b="1" i="0">
+              <a:rPr sz="2000" b="1" i="0">
                 <a:solidFill>
                   <a:srgbClr val="333333"/>
                 </a:solidFill>
@@ -6671,7 +6671,7 @@
               <a:t>Aviso:</a:t>
             </a:r>
             <a:r>
-              <a:rPr sz="1600" b="0" i="0">
+              <a:rPr sz="2000" b="0" i="0">
                 <a:solidFill>
                   <a:srgbClr val="333333"/>
                 </a:solidFill>
@@ -6680,7 +6680,7 @@
               <a:t> El informe y las capturas quedan en la carpeta del equipo: es un proyecto completo y documentado, hecho en primer semestre, y sirve para un portafolio. Y </a:t>
             </a:r>
             <a:r>
-              <a:rPr sz="1600" b="1" i="0">
+              <a:rPr sz="2000" b="1" i="0">
                 <a:solidFill>
                   <a:srgbClr val="333333"/>
                 </a:solidFill>
@@ -6689,7 +6689,7 @@
               <a:t>el siguiente paso de su proyecto está escrito en la sección 10</a:t>
             </a:r>
             <a:r>
-              <a:rPr sz="1600" b="0" i="0">
+              <a:rPr sz="2000" b="0" i="0">
                 <a:solidFill>
                   <a:srgbClr val="333333"/>
                 </a:solidFill>
@@ -7263,7 +7263,7 @@
         <p:spPr>
           <a:xfrm>
             <a:off x="502920" y="2798064"/>
-            <a:ext cx="2164019" cy="2560320"/>
+            <a:ext cx="2164019" cy="3099816"/>
           </a:xfrm>
           <a:prstGeom prst="rect">
             <a:avLst/>
@@ -7378,7 +7378,7 @@
         <p:spPr>
           <a:xfrm>
             <a:off x="2758379" y="2798064"/>
-            <a:ext cx="2164019" cy="2560320"/>
+            <a:ext cx="2164019" cy="3099816"/>
           </a:xfrm>
           <a:prstGeom prst="rect">
             <a:avLst/>
@@ -7493,7 +7493,7 @@
         <p:spPr>
           <a:xfrm>
             <a:off x="5013838" y="2798064"/>
-            <a:ext cx="2164019" cy="2560320"/>
+            <a:ext cx="2164019" cy="3099816"/>
           </a:xfrm>
           <a:prstGeom prst="rect">
             <a:avLst/>
@@ -7608,7 +7608,7 @@
         <p:spPr>
           <a:xfrm>
             <a:off x="7269297" y="2798064"/>
-            <a:ext cx="2164019" cy="2560320"/>
+            <a:ext cx="2164019" cy="3099816"/>
           </a:xfrm>
           <a:prstGeom prst="rect">
             <a:avLst/>
@@ -7723,7 +7723,7 @@
         <p:spPr>
           <a:xfrm>
             <a:off x="9524756" y="2798064"/>
-            <a:ext cx="2164019" cy="2560320"/>
+            <a:ext cx="2164019" cy="3099816"/>
           </a:xfrm>
           <a:prstGeom prst="rect">
             <a:avLst/>
@@ -7757,8 +7757,8 @@
         </p:nvSpPr>
         <p:spPr>
           <a:xfrm>
-            <a:off x="457200" y="5943600"/>
-            <a:ext cx="11277295" cy="365760"/>
+            <a:off x="457200" y="5806440"/>
+            <a:ext cx="11277295" cy="640080"/>
           </a:xfrm>
           <a:prstGeom prst="rect">
             <a:avLst/>
@@ -8038,7 +8038,7 @@
               </a:spcAft>
             </a:pPr>
             <a:r>
-              <a:rPr sz="1600" b="0" i="0">
+              <a:rPr sz="2000" b="0" i="0">
                 <a:solidFill>
                   <a:srgbClr val="333333"/>
                 </a:solidFill>
@@ -8047,7 +8047,7 @@
               <a:t>–   Armar y entregar el </a:t>
             </a:r>
             <a:r>
-              <a:rPr sz="1600" b="1" i="0">
+              <a:rPr sz="2000" b="1" i="0">
                 <a:solidFill>
                   <a:srgbClr val="333333"/>
                 </a:solidFill>
@@ -8056,7 +8056,7 @@
               <a:t>informe final</a:t>
             </a:r>
             <a:r>
-              <a:rPr sz="1600" b="0" i="0">
+              <a:rPr sz="2000" b="0" i="0">
                 <a:solidFill>
                   <a:srgbClr val="333333"/>
                 </a:solidFill>
@@ -8065,7 +8065,7 @@
               <a:t> con sus doce secciones (</a:t>
             </a:r>
             <a:r>
-              <a:rPr sz="1600" b="1" i="0">
+              <a:rPr sz="2000" b="1" i="0">
                 <a:solidFill>
                   <a:srgbClr val="333333"/>
                 </a:solidFill>
@@ -8074,7 +8074,7 @@
               <a:t>20 %</a:t>
             </a:r>
             <a:r>
-              <a:rPr sz="1600" b="0" i="0">
+              <a:rPr sz="2000" b="0" i="0">
                 <a:solidFill>
                   <a:srgbClr val="333333"/>
                 </a:solidFill>
@@ -8090,7 +8090,7 @@
               </a:spcAft>
             </a:pPr>
             <a:r>
-              <a:rPr sz="1600" b="0" i="0">
+              <a:rPr sz="2000" b="0" i="0">
                 <a:solidFill>
                   <a:srgbClr val="333333"/>
                 </a:solidFill>
@@ -8099,7 +8099,7 @@
               <a:t>–   </a:t>
             </a:r>
             <a:r>
-              <a:rPr sz="1600" b="1" i="0">
+              <a:rPr sz="2000" b="1" i="0">
                 <a:solidFill>
                   <a:srgbClr val="333333"/>
                 </a:solidFill>
@@ -8108,7 +8108,7 @@
               <a:t>Socializar</a:t>
             </a:r>
             <a:r>
-              <a:rPr sz="1600" b="0" i="0">
+              <a:rPr sz="2000" b="0" i="0">
                 <a:solidFill>
                   <a:srgbClr val="333333"/>
                 </a:solidFill>
@@ -8124,7 +8124,7 @@
               </a:spcAft>
             </a:pPr>
             <a:r>
-              <a:rPr sz="1600" b="0" i="0">
+              <a:rPr sz="2000" b="0" i="0">
                 <a:solidFill>
                   <a:srgbClr val="333333"/>
                 </a:solidFill>
@@ -8133,7 +8133,7 @@
               <a:t>–   Hacer una </a:t>
             </a:r>
             <a:r>
-              <a:rPr sz="1600" b="1" i="0">
+              <a:rPr sz="2000" b="1" i="0">
                 <a:solidFill>
                   <a:srgbClr val="333333"/>
                 </a:solidFill>
@@ -8142,7 +8142,7 @@
               <a:t>autoevaluación y una coevaluación</a:t>
             </a:r>
             <a:r>
-              <a:rPr sz="1600" b="0" i="0">
+              <a:rPr sz="2000" b="0" i="0">
                 <a:solidFill>
                   <a:srgbClr val="333333"/>
                 </a:solidFill>
@@ -8158,7 +8158,7 @@
               </a:spcAft>
             </a:pPr>
             <a:r>
-              <a:rPr sz="1600" b="0" i="0">
+              <a:rPr sz="2000" b="0" i="0">
                 <a:solidFill>
                   <a:srgbClr val="333333"/>
                 </a:solidFill>
@@ -8167,7 +8167,7 @@
               <a:t>–   Reconocer </a:t>
             </a:r>
             <a:r>
-              <a:rPr sz="1600" b="1" i="0">
+              <a:rPr sz="2000" b="1" i="0">
                 <a:solidFill>
                   <a:srgbClr val="333333"/>
                 </a:solidFill>
@@ -8176,7 +8176,7 @@
               <a:t>qué se sabe hacer hoy</a:t>
             </a:r>
             <a:r>
-              <a:rPr sz="1600" b="0" i="0">
+              <a:rPr sz="2000" b="0" i="0">
                 <a:solidFill>
                   <a:srgbClr val="333333"/>
                 </a:solidFill>

--- a/Introduccion a la Ingenieria/Clases/Clase 16 - Socializacion y evaluacion final del curso/Presentacion.pptx
+++ b/Introduccion a la Ingenieria/Clases/Clase 16 - Socializacion y evaluacion final del curso/Presentacion.pptx
@@ -3998,7 +3998,7 @@
                 </a:solidFill>
                 <a:latin typeface="Calibri"/>
               </a:rPr>
-              <a:t>Sesión 16 · con su propio proyecto como prueba</a:t>
+              <a:t>Clase 16 · con su propio proyecto como prueba</a:t>
             </a:r>
           </a:p>
         </p:txBody>
@@ -6584,7 +6584,7 @@
                 </a:solidFill>
                 <a:latin typeface="Calibri"/>
               </a:rPr>
-              <a:t> de la sesión 15 (15 %), el prototipo probado con personas reales y la galería del curso.</a:t>
+              <a:t> de la Clase 15 (15 %), el prototipo probado con personas reales y la galería del curso.</a:t>
             </a:r>
           </a:p>
           <a:p>
@@ -7788,7 +7788,7 @@
                 </a:solidFill>
                 <a:latin typeface="Calibri"/>
               </a:rPr>
-              <a:t> El 40 % del corte 3 se reparte en exposición final 15 % (sesión 15) + </a:t>
+              <a:t> El 40 % del corte 3 se reparte en exposición final 15 % (Clase 15) + </a:t>
             </a:r>
             <a:r>
               <a:rPr sz="1200" b="1" i="1">
@@ -8969,7 +8969,7 @@
                           </a:solidFill>
                           <a:latin typeface="Calibri"/>
                         </a:rPr>
-                        <a:t>sesión 3</a:t>
+                        <a:t>Clase 3</a:t>
                       </a:r>
                       <a:r>
                         <a:rPr sz="1100" b="0" i="0">
@@ -8987,7 +8987,7 @@
                           </a:solidFill>
                           <a:latin typeface="Calibri"/>
                         </a:rPr>
-                        <a:t>sesión 13</a:t>
+                        <a:t>Clase 13</a:t>
                       </a:r>
                       <a:r>
                         <a:rPr sz="1100" b="0" i="0">
@@ -9666,7 +9666,7 @@
                           </a:solidFill>
                           <a:latin typeface="Calibri"/>
                         </a:rPr>
-                        <a:t>Sesión 12</a:t>
+                        <a:t>Clase 12</a:t>
                       </a:r>
                       <a:r>
                         <a:rPr sz="1100" b="0" i="0">
@@ -9752,7 +9752,7 @@
                           </a:solidFill>
                           <a:latin typeface="Calibri"/>
                         </a:rPr>
-                        <a:t>sesión 13</a:t>
+                        <a:t>Clase 13</a:t>
                       </a:r>
                       <a:r>
                         <a:rPr sz="1100" b="0" i="0">
@@ -9874,7 +9874,7 @@
                           </a:solidFill>
                           <a:latin typeface="Calibri"/>
                         </a:rPr>
-                        <a:t>sesiones 12 y 13</a:t>
+                        <a:t>Clases 12 y 13</a:t>
                       </a:r>
                       <a:r>
                         <a:rPr sz="1100" b="0" i="0">
@@ -11957,7 +11957,7 @@
                 </a:solidFill>
                 <a:latin typeface="Calibri"/>
               </a:rPr>
-              <a:t>La sección 10 vacía o con «ninguna» dice que el equipo no probó nada con nadie. Después de la sesión 12, todos los equipos tienen limitaciones reales.</a:t>
+              <a:t>La sección 10 vacía o con «ninguna» dice que el equipo no probó nada con nadie. Después de la Clase 12, todos los equipos tienen limitaciones reales.</a:t>
             </a:r>
           </a:p>
         </p:txBody>
@@ -12696,7 +12696,7 @@
                 </a:solidFill>
                 <a:latin typeface="Calibri"/>
               </a:rPr>
-              <a:t>. Se escribe con la misma regla de la sesión 12: </a:t>
+              <a:t>. Se escribe con la misma regla de la Clase 12: </a:t>
             </a:r>
             <a:r>
               <a:rPr sz="1400" b="1" i="0">
